--- a/docs/ecostats_lectures/lecture_07/07_01_lecture_powerpoint.pptx
+++ b/docs/ecostats_lectures/lecture_07/07_01_lecture_powerpoint.pptx
@@ -3565,17 +3565,6 @@
               <a:rPr>
                 <a:latin typeface="Courier"/>
               </a:rPr>
-              <a:t>[1] "Null hypothesis is that data is normally distributed"</a:t>
-            </a:r>
-          </a:p>
-          <a:p>
-            <a:pPr lvl="0" indent="0">
-              <a:buNone/>
-            </a:pPr>
-            <a:r>
-              <a:rPr>
-                <a:latin typeface="Courier"/>
-              </a:rPr>
               <a:t>
     Shapiro-Wilk normality test
 data:  ne12_data$length_mm
@@ -3738,7 +3727,7 @@
       </p:sp>
       <p:pic>
         <p:nvPicPr>
-          <p:cNvPr descr="07_01_lecture_powerpoint_files/figure-pptx/unnamed-chunk-4-1.png" id="0" name="Picture 1"/>
+          <p:cNvPr descr="07_01_lecture_powerpoint_files/figure-pptx/unnamed-chunk-5-1.png" id="0" name="Picture 1"/>
           <p:cNvPicPr>
             <a:picLocks noGrp="1" noChangeAspect="1"/>
           </p:cNvPicPr>
@@ -3752,8 +3741,8 @@
         </p:blipFill>
         <p:spPr bwMode="auto">
           <a:xfrm>
-            <a:off x="6121400" y="1778000"/>
-            <a:ext cx="2781300" cy="2222500"/>
+            <a:off x="6121400" y="2044700"/>
+            <a:ext cx="2781300" cy="1714500"/>
           </a:xfrm>
           <a:prstGeom prst="rect">
             <a:avLst/>
@@ -3902,7 +3891,7 @@
       </p:sp>
       <p:pic>
         <p:nvPicPr>
-          <p:cNvPr descr="07_01_lecture_powerpoint_files/figure-pptx/unnamed-chunk-5-1.png" id="0" name="Picture 1"/>
+          <p:cNvPr descr="07_01_lecture_powerpoint_files/figure-pptx/unnamed-chunk-6-1.png" id="0" name="Picture 1"/>
           <p:cNvPicPr>
             <a:picLocks noGrp="1" noChangeAspect="1"/>
           </p:cNvPicPr>
@@ -4057,7 +4046,7 @@
       </p:sp>
       <p:pic>
         <p:nvPicPr>
-          <p:cNvPr descr="07_01_lecture_powerpoint_files/figure-pptx/unnamed-chunk-6-1.png" id="0" name="Picture 1"/>
+          <p:cNvPr descr="07_01_lecture_powerpoint_files/figure-pptx/unnamed-chunk-7-1.png" id="0" name="Picture 1"/>
           <p:cNvPicPr>
             <a:picLocks noGrp="1" noChangeAspect="1"/>
           </p:cNvPicPr>
@@ -4071,8 +4060,8 @@
         </p:blipFill>
         <p:spPr bwMode="auto">
           <a:xfrm>
-            <a:off x="6121400" y="1778000"/>
-            <a:ext cx="2781300" cy="2222500"/>
+            <a:off x="6121400" y="2044700"/>
+            <a:ext cx="2781300" cy="1714500"/>
           </a:xfrm>
           <a:prstGeom prst="rect">
             <a:avLst/>
@@ -4155,28 +4144,33 @@
           <a:bodyPr/>
           <a:lstStyle/>
           <a:p>
-            <a:pPr lvl="0"/>
-            <a:r>
-              <a:rPr/>
+            <a:pPr lvl="0" indent="0" marL="0">
+              <a:spcBef>
+                <a:spcPts val="3000"/>
+              </a:spcBef>
+              <a:buNone/>
+            </a:pPr>
+            <a:r>
+              <a:rPr b="1"/>
               <a:t>QQ-plots: tool for assessing normality</a:t>
             </a:r>
           </a:p>
           <a:p>
-            <a:pPr lvl="1"/>
+            <a:pPr lvl="0"/>
             <a:r>
               <a:rPr/>
               <a:t>On x- theoretical quantiles from SND</a:t>
             </a:r>
           </a:p>
           <a:p>
-            <a:pPr lvl="1"/>
+            <a:pPr lvl="0"/>
             <a:r>
               <a:rPr/>
               <a:t>On y- ordered sample values</a:t>
             </a:r>
           </a:p>
           <a:p>
-            <a:pPr lvl="1"/>
+            <a:pPr lvl="0"/>
             <a:r>
               <a:rPr/>
               <a:t>Deviation from normal can be detected as deviation from straight line</a:t>
@@ -4186,7 +4180,7 @@
       </p:sp>
       <p:pic>
         <p:nvPicPr>
-          <p:cNvPr descr="07_01_lecture_powerpoint_files/figure-pptx/unnamed-chunk-7-1.png" id="0" name="Picture 1"/>
+          <p:cNvPr descr="07_01_lecture_powerpoint_files/figure-pptx/unnamed-chunk-8-1.png" id="0" name="Picture 1"/>
           <p:cNvPicPr>
             <a:picLocks noGrp="1" noChangeAspect="1"/>
           </p:cNvPicPr>
@@ -4200,8 +4194,8 @@
         </p:blipFill>
         <p:spPr bwMode="auto">
           <a:xfrm>
-            <a:off x="6121400" y="1778000"/>
-            <a:ext cx="2781300" cy="2222500"/>
+            <a:off x="6121400" y="2044700"/>
+            <a:ext cx="2781300" cy="1714500"/>
           </a:xfrm>
           <a:prstGeom prst="rect">
             <a:avLst/>
@@ -4458,7 +4452,7 @@
       </p:sp>
       <p:pic>
         <p:nvPicPr>
-          <p:cNvPr descr="07_01_lecture_powerpoint_files/figure-pptx/unnamed-chunk-8-1.png" id="0" name="Picture 1"/>
+          <p:cNvPr descr="07_01_lecture_powerpoint_files/figure-pptx/unnamed-chunk-9-1.png" id="0" name="Picture 1"/>
           <p:cNvPicPr>
             <a:picLocks noGrp="1" noChangeAspect="1"/>
           </p:cNvPicPr>
@@ -4958,6 +4952,13 @@
           <a:p>
             <a:pPr lvl="0"/>
             <a:r>
+              <a:rPr/>
+              <a:t>Power - what is it and why talk about it.</a:t>
+            </a:r>
+          </a:p>
+          <a:p>
+            <a:pPr lvl="0"/>
+            <a:r>
               <a:rPr b="1"/>
               <a:t>Assumptions of parametric tests</a:t>
             </a:r>
@@ -4966,7 +4967,28 @@
             <a:pPr lvl="0"/>
             <a:r>
               <a:rPr/>
-              <a:t>What next</a:t>
+              <a:t>What next — WHEN ASSUMPTIONS FAIL!</a:t>
+            </a:r>
+          </a:p>
+          <a:p>
+            <a:pPr lvl="1"/>
+            <a:r>
+              <a:rPr/>
+              <a:t>we will always cover parametric tests</a:t>
+            </a:r>
+          </a:p>
+          <a:p>
+            <a:pPr lvl="1"/>
+            <a:r>
+              <a:rPr/>
+              <a:t>then we will cover non parametric approaches</a:t>
+            </a:r>
+          </a:p>
+          <a:p>
+            <a:pPr lvl="1"/>
+            <a:r>
+              <a:rPr/>
+              <a:t>later on we will explore other approaches to use the appropriate underlying distribution that is not normal but Poisson or other</a:t>
             </a:r>
           </a:p>
         </p:txBody>
@@ -5157,7 +5179,7 @@
       </p:sp>
       <p:pic>
         <p:nvPicPr>
-          <p:cNvPr descr="07_01_lecture_powerpoint_files/figure-pptx/unnamed-chunk-11-1.png" id="0" name="Picture 1"/>
+          <p:cNvPr descr="07_01_lecture_powerpoint_files/figure-pptx/unnamed-chunk-12-1.png" id="0" name="Picture 1"/>
           <p:cNvPicPr>
             <a:picLocks noGrp="1" noChangeAspect="1"/>
           </p:cNvPicPr>
@@ -6583,7 +6605,7 @@
             </a:pPr>
             <a:r>
               <a:rPr/>
-              <a:t>Summary - Statistical Test Options</a:t>
+              <a:t>Summary - Parametric Test Options</a:t>
             </a:r>
           </a:p>
         </p:txBody>
@@ -6611,7 +6633,49 @@
             </a:pPr>
             <a:r>
               <a:rPr b="1"/>
-              <a:t>Statistical Test Options</a:t>
+              <a:t>1. Standard T-Test</a:t>
+            </a:r>
+          </a:p>
+          <a:p>
+            <a:pPr lvl="0"/>
+            <a:r>
+              <a:rPr b="1"/>
+              <a:t>Strengths:</a:t>
+            </a:r>
+          </a:p>
+          <a:p>
+            <a:pPr lvl="1"/>
+            <a:r>
+              <a:rPr/>
+              <a:t>High statistical power when assumptions are met</a:t>
+            </a:r>
+          </a:p>
+          <a:p>
+            <a:pPr lvl="1"/>
+            <a:r>
+              <a:rPr/>
+              <a:t>- Well understood and widely accepted</a:t>
+            </a:r>
+          </a:p>
+          <a:p>
+            <a:pPr lvl="0"/>
+            <a:r>
+              <a:rPr b="1"/>
+              <a:t>Weaknesses:</a:t>
+            </a:r>
+          </a:p>
+          <a:p>
+            <a:pPr lvl="1"/>
+            <a:r>
+              <a:rPr/>
+              <a:t>- Sensitive to violations of normality, equal variance</a:t>
+            </a:r>
+          </a:p>
+          <a:p>
+            <a:pPr lvl="1"/>
+            <a:r>
+              <a:rPr/>
+              <a:t>- Heavily influenced by outliers</a:t>
             </a:r>
           </a:p>
           <a:p>
@@ -6623,71 +6687,56 @@
             </a:pPr>
             <a:r>
               <a:rPr b="1"/>
-              <a:t>1. Standard T-Test</a:t>
-            </a:r>
-          </a:p>
-          <a:p>
-            <a:pPr lvl="0" indent="0" marL="0">
-              <a:buNone/>
-            </a:pPr>
+              <a:t>2. Welch’s T-Test</a:t>
+            </a:r>
+          </a:p>
+          <a:p>
+            <a:pPr lvl="0"/>
             <a:r>
               <a:rPr b="1"/>
               <a:t>Strengths:</a:t>
             </a:r>
-            <a:r>
-              <a:rPr/>
-              <a:t> - High statistical power when assumptions are met - Well understood and widely accepted</a:t>
-            </a:r>
-          </a:p>
-          <a:p>
-            <a:pPr lvl="0" indent="0" marL="0">
-              <a:buNone/>
-            </a:pPr>
+          </a:p>
+          <a:p>
+            <a:pPr lvl="1"/>
+            <a:r>
+              <a:rPr/>
+              <a:t>- Robust to violations of equal variance assumption</a:t>
+            </a:r>
+          </a:p>
+          <a:p>
+            <a:pPr lvl="1"/>
+            <a:r>
+              <a:rPr/>
+              <a:t>- Handles unequal sample sizes well</a:t>
+            </a:r>
+          </a:p>
+          <a:p>
+            <a:pPr lvl="1"/>
+            <a:r>
+              <a:rPr/>
+              <a:t>- Still parametric (assumes normality)</a:t>
+            </a:r>
+          </a:p>
+          <a:p>
+            <a:pPr lvl="0"/>
             <a:r>
               <a:rPr b="1"/>
               <a:t>Weaknesses:</a:t>
             </a:r>
-            <a:r>
-              <a:rPr/>
-              <a:t> - Sensitive to violations of normality, equal variance - Heavily influenced by outliers</a:t>
-            </a:r>
-          </a:p>
-          <a:p>
-            <a:pPr lvl="0" indent="0" marL="0">
-              <a:spcBef>
-                <a:spcPts val="3000"/>
-              </a:spcBef>
-              <a:buNone/>
-            </a:pPr>
-            <a:r>
-              <a:rPr b="1"/>
-              <a:t>2. Welch’s T-Test</a:t>
-            </a:r>
-          </a:p>
-          <a:p>
-            <a:pPr lvl="0" indent="0" marL="0">
-              <a:buNone/>
-            </a:pPr>
-            <a:r>
-              <a:rPr b="1"/>
-              <a:t>Strengths:</a:t>
-            </a:r>
-            <a:r>
-              <a:rPr/>
-              <a:t> - Robust to violations of equal variance assumption - Handles unequal sample sizes well - Still parametric (assumes normality)</a:t>
-            </a:r>
-          </a:p>
-          <a:p>
-            <a:pPr lvl="0" indent="0" marL="0">
-              <a:buNone/>
-            </a:pPr>
-            <a:r>
-              <a:rPr b="1"/>
-              <a:t>Weaknesses:</a:t>
-            </a:r>
-            <a:r>
-              <a:rPr/>
-              <a:t> - Slightly less powerful than standard t-test when variances are equal - Still assumes normal distribution</a:t>
+          </a:p>
+          <a:p>
+            <a:pPr lvl="1"/>
+            <a:r>
+              <a:rPr/>
+              <a:t>- Slightly less powerful than standard t-test when variances are equal</a:t>
+            </a:r>
+          </a:p>
+          <a:p>
+            <a:pPr lvl="1"/>
+            <a:r>
+              <a:rPr/>
+              <a:t>- Still assumes normal distribution</a:t>
             </a:r>
           </a:p>
         </p:txBody>
@@ -6771,29 +6820,59 @@
             </a:r>
           </a:p>
           <a:p>
-            <a:pPr lvl="0" indent="0" marL="0">
-              <a:buNone/>
-            </a:pPr>
+            <a:pPr lvl="0"/>
             <a:r>
               <a:rPr b="1"/>
               <a:t>Strengths:</a:t>
             </a:r>
-            <a:r>
-              <a:rPr/>
-              <a:t> - Non-parametric: doesn’t assume normal distribution - Robust against outliers - Works with ordinal data</a:t>
-            </a:r>
-          </a:p>
-          <a:p>
-            <a:pPr lvl="0" indent="0" marL="0">
-              <a:buNone/>
-            </a:pPr>
+          </a:p>
+          <a:p>
+            <a:pPr lvl="1"/>
+            <a:r>
+              <a:rPr/>
+              <a:t>- Non-parametric: doesn’t assume normal distribution</a:t>
+            </a:r>
+          </a:p>
+          <a:p>
+            <a:pPr lvl="1"/>
+            <a:r>
+              <a:rPr/>
+              <a:t>- Robust against outliers</a:t>
+            </a:r>
+          </a:p>
+          <a:p>
+            <a:pPr lvl="1"/>
+            <a:r>
+              <a:rPr/>
+              <a:t>- Works with ordinal data</a:t>
+            </a:r>
+          </a:p>
+          <a:p>
+            <a:pPr lvl="0"/>
             <a:r>
               <a:rPr b="1"/>
               <a:t>Weaknesses:</a:t>
             </a:r>
-            <a:r>
-              <a:rPr/>
-              <a:t> - Less statistical power than parametric tests - Still assumes similar distributions and approximate equal variance - Tests median differences rather than mean differences</a:t>
+          </a:p>
+          <a:p>
+            <a:pPr lvl="1"/>
+            <a:r>
+              <a:rPr/>
+              <a:t>- Less statistical power than parametric tests</a:t>
+            </a:r>
+          </a:p>
+          <a:p>
+            <a:pPr lvl="1"/>
+            <a:r>
+              <a:rPr/>
+              <a:t>- Still assumes similar distributions and approximate equal variance</a:t>
+            </a:r>
+          </a:p>
+          <a:p>
+            <a:pPr lvl="1"/>
+            <a:r>
+              <a:rPr/>
+              <a:t>- Tests median differences rather than mean differences</a:t>
             </a:r>
           </a:p>
           <a:p>
@@ -6809,29 +6888,66 @@
             </a:r>
           </a:p>
           <a:p>
-            <a:pPr lvl="0" indent="0" marL="0">
-              <a:buNone/>
-            </a:pPr>
+            <a:pPr lvl="0"/>
             <a:r>
               <a:rPr b="1"/>
               <a:t>Strengths:</a:t>
             </a:r>
-            <a:r>
-              <a:rPr/>
-              <a:t> - Distribution-free: doesn’t assume a specific distribution - Can be applied to many types of test statistics - Handles small sample sizes well - Directly estimates p-values through resampling</a:t>
-            </a:r>
-          </a:p>
-          <a:p>
-            <a:pPr lvl="0" indent="0" marL="0">
-              <a:buNone/>
-            </a:pPr>
+          </a:p>
+          <a:p>
+            <a:pPr lvl="1"/>
+            <a:r>
+              <a:rPr/>
+              <a:t>- Distribution-free: doesn’t assume a specific distribution</a:t>
+            </a:r>
+          </a:p>
+          <a:p>
+            <a:pPr lvl="1"/>
+            <a:r>
+              <a:rPr/>
+              <a:t>- Can be applied to many types of test statistics</a:t>
+            </a:r>
+          </a:p>
+          <a:p>
+            <a:pPr lvl="1"/>
+            <a:r>
+              <a:rPr/>
+              <a:t>- Handles small sample sizes well</a:t>
+            </a:r>
+          </a:p>
+          <a:p>
+            <a:pPr lvl="1"/>
+            <a:r>
+              <a:rPr/>
+              <a:t>- Directly estimates p-values through resampling</a:t>
+            </a:r>
+          </a:p>
+          <a:p>
+            <a:pPr lvl="0"/>
             <a:r>
               <a:rPr b="1"/>
               <a:t>Weaknesses:</a:t>
             </a:r>
-            <a:r>
-              <a:rPr/>
-              <a:t> - Computationally intensive - Assumes exchangeability under the null hypothesis - Requires similar distributions and equal variance</a:t>
+          </a:p>
+          <a:p>
+            <a:pPr lvl="1"/>
+            <a:r>
+              <a:rPr/>
+              <a:t>- Computationally intensive</a:t>
+            </a:r>
+          </a:p>
+          <a:p>
+            <a:pPr lvl="1"/>
+            <a:r>
+              <a:rPr/>
+              <a:t>- Assumes exchangeability under the null hypothesis</a:t>
+            </a:r>
+          </a:p>
+          <a:p>
+            <a:pPr lvl="1"/>
+            <a:r>
+              <a:rPr/>
+              <a:t>- Requires similar distributions and equal variance</a:t>
             </a:r>
           </a:p>
         </p:txBody>
@@ -7501,6 +7617,490 @@
 6 I8            lake trout       607   2100 I8   </a:t>
             </a:r>
           </a:p>
+          <a:p>
+            <a:pPr lvl="0" indent="0">
+              <a:buNone/>
+            </a:pPr>
+            <a:r>
+              <a:rPr>
+                <a:solidFill>
+                  <a:srgbClr val="5E5E5E"/>
+                </a:solidFill>
+                <a:latin typeface="Courier"/>
+              </a:rPr>
+              <a:t># I had accdentally asked you to do mode in HW2 - wiht out telling you how... </a:t>
+            </a:r>
+            <a:br/>
+            <a:r>
+              <a:rPr>
+                <a:solidFill>
+                  <a:srgbClr val="5E5E5E"/>
+                </a:solidFill>
+                <a:latin typeface="Courier"/>
+              </a:rPr>
+              <a:t># here is one approach</a:t>
+            </a:r>
+            <a:br/>
+            <a:r>
+              <a:rPr>
+                <a:solidFill>
+                  <a:srgbClr val="003B4F"/>
+                </a:solidFill>
+                <a:latin typeface="Courier"/>
+              </a:rPr>
+              <a:t>lt_df </a:t>
+            </a:r>
+            <a:r>
+              <a:rPr>
+                <a:solidFill>
+                  <a:srgbClr val="5E5E5E"/>
+                </a:solidFill>
+                <a:latin typeface="Courier"/>
+              </a:rPr>
+              <a:t>%&gt;%</a:t>
+            </a:r>
+            <a:br/>
+            <a:r>
+              <a:rPr>
+                <a:solidFill>
+                  <a:srgbClr val="003B4F"/>
+                </a:solidFill>
+                <a:latin typeface="Courier"/>
+              </a:rPr>
+              <a:t>  </a:t>
+            </a:r>
+            <a:r>
+              <a:rPr>
+                <a:solidFill>
+                  <a:srgbClr val="4758AB"/>
+                </a:solidFill>
+                <a:latin typeface="Courier"/>
+              </a:rPr>
+              <a:t>filter</a:t>
+            </a:r>
+            <a:r>
+              <a:rPr>
+                <a:solidFill>
+                  <a:srgbClr val="003B4F"/>
+                </a:solidFill>
+                <a:latin typeface="Courier"/>
+              </a:rPr>
+              <a:t>(</a:t>
+            </a:r>
+            <a:r>
+              <a:rPr>
+                <a:solidFill>
+                  <a:srgbClr val="5E5E5E"/>
+                </a:solidFill>
+                <a:latin typeface="Courier"/>
+              </a:rPr>
+              <a:t>!</a:t>
+            </a:r>
+            <a:r>
+              <a:rPr>
+                <a:solidFill>
+                  <a:srgbClr val="4758AB"/>
+                </a:solidFill>
+                <a:latin typeface="Courier"/>
+              </a:rPr>
+              <a:t>is.na</a:t>
+            </a:r>
+            <a:r>
+              <a:rPr>
+                <a:solidFill>
+                  <a:srgbClr val="003B4F"/>
+                </a:solidFill>
+                <a:latin typeface="Courier"/>
+              </a:rPr>
+              <a:t>(mass_g)) </a:t>
+            </a:r>
+            <a:r>
+              <a:rPr>
+                <a:solidFill>
+                  <a:srgbClr val="5E5E5E"/>
+                </a:solidFill>
+                <a:latin typeface="Courier"/>
+              </a:rPr>
+              <a:t>%&gt;%</a:t>
+            </a:r>
+            <a:br/>
+            <a:r>
+              <a:rPr>
+                <a:solidFill>
+                  <a:srgbClr val="003B4F"/>
+                </a:solidFill>
+                <a:latin typeface="Courier"/>
+              </a:rPr>
+              <a:t>  </a:t>
+            </a:r>
+            <a:r>
+              <a:rPr>
+                <a:solidFill>
+                  <a:srgbClr val="4758AB"/>
+                </a:solidFill>
+                <a:latin typeface="Courier"/>
+              </a:rPr>
+              <a:t>group_by</a:t>
+            </a:r>
+            <a:r>
+              <a:rPr>
+                <a:solidFill>
+                  <a:srgbClr val="003B4F"/>
+                </a:solidFill>
+                <a:latin typeface="Courier"/>
+              </a:rPr>
+              <a:t>(lake, mass_g) </a:t>
+            </a:r>
+            <a:r>
+              <a:rPr>
+                <a:solidFill>
+                  <a:srgbClr val="5E5E5E"/>
+                </a:solidFill>
+                <a:latin typeface="Courier"/>
+              </a:rPr>
+              <a:t>%&gt;%</a:t>
+            </a:r>
+            <a:br/>
+            <a:r>
+              <a:rPr>
+                <a:solidFill>
+                  <a:srgbClr val="003B4F"/>
+                </a:solidFill>
+                <a:latin typeface="Courier"/>
+              </a:rPr>
+              <a:t>  </a:t>
+            </a:r>
+            <a:r>
+              <a:rPr>
+                <a:solidFill>
+                  <a:srgbClr val="4758AB"/>
+                </a:solidFill>
+                <a:latin typeface="Courier"/>
+              </a:rPr>
+              <a:t>summarise</a:t>
+            </a:r>
+            <a:r>
+              <a:rPr>
+                <a:solidFill>
+                  <a:srgbClr val="003B4F"/>
+                </a:solidFill>
+                <a:latin typeface="Courier"/>
+              </a:rPr>
+              <a:t>(</a:t>
+            </a:r>
+            <a:r>
+              <a:rPr>
+                <a:solidFill>
+                  <a:srgbClr val="657422"/>
+                </a:solidFill>
+                <a:latin typeface="Courier"/>
+              </a:rPr>
+              <a:t>count =</a:t>
+            </a:r>
+            <a:r>
+              <a:rPr>
+                <a:solidFill>
+                  <a:srgbClr val="003B4F"/>
+                </a:solidFill>
+                <a:latin typeface="Courier"/>
+              </a:rPr>
+              <a:t> </a:t>
+            </a:r>
+            <a:r>
+              <a:rPr>
+                <a:solidFill>
+                  <a:srgbClr val="4758AB"/>
+                </a:solidFill>
+                <a:latin typeface="Courier"/>
+              </a:rPr>
+              <a:t>n</a:t>
+            </a:r>
+            <a:r>
+              <a:rPr>
+                <a:solidFill>
+                  <a:srgbClr val="003B4F"/>
+                </a:solidFill>
+                <a:latin typeface="Courier"/>
+              </a:rPr>
+              <a:t>(), </a:t>
+            </a:r>
+            <a:r>
+              <a:rPr>
+                <a:solidFill>
+                  <a:srgbClr val="657422"/>
+                </a:solidFill>
+                <a:latin typeface="Courier"/>
+              </a:rPr>
+              <a:t>.groups =</a:t>
+            </a:r>
+            <a:r>
+              <a:rPr>
+                <a:solidFill>
+                  <a:srgbClr val="003B4F"/>
+                </a:solidFill>
+                <a:latin typeface="Courier"/>
+              </a:rPr>
+              <a:t> </a:t>
+            </a:r>
+            <a:r>
+              <a:rPr>
+                <a:solidFill>
+                  <a:srgbClr val="20794D"/>
+                </a:solidFill>
+                <a:latin typeface="Courier"/>
+              </a:rPr>
+              <a:t>"drop_last"</a:t>
+            </a:r>
+            <a:r>
+              <a:rPr>
+                <a:solidFill>
+                  <a:srgbClr val="003B4F"/>
+                </a:solidFill>
+                <a:latin typeface="Courier"/>
+              </a:rPr>
+              <a:t>) </a:t>
+            </a:r>
+            <a:r>
+              <a:rPr>
+                <a:solidFill>
+                  <a:srgbClr val="5E5E5E"/>
+                </a:solidFill>
+                <a:latin typeface="Courier"/>
+              </a:rPr>
+              <a:t>%&gt;%</a:t>
+            </a:r>
+            <a:br/>
+            <a:r>
+              <a:rPr>
+                <a:solidFill>
+                  <a:srgbClr val="003B4F"/>
+                </a:solidFill>
+                <a:latin typeface="Courier"/>
+              </a:rPr>
+              <a:t>  </a:t>
+            </a:r>
+            <a:r>
+              <a:rPr>
+                <a:solidFill>
+                  <a:srgbClr val="4758AB"/>
+                </a:solidFill>
+                <a:latin typeface="Courier"/>
+              </a:rPr>
+              <a:t>arrange</a:t>
+            </a:r>
+            <a:r>
+              <a:rPr>
+                <a:solidFill>
+                  <a:srgbClr val="003B4F"/>
+                </a:solidFill>
+                <a:latin typeface="Courier"/>
+              </a:rPr>
+              <a:t>(</a:t>
+            </a:r>
+            <a:r>
+              <a:rPr>
+                <a:solidFill>
+                  <a:srgbClr val="4758AB"/>
+                </a:solidFill>
+                <a:latin typeface="Courier"/>
+              </a:rPr>
+              <a:t>desc</a:t>
+            </a:r>
+            <a:r>
+              <a:rPr>
+                <a:solidFill>
+                  <a:srgbClr val="003B4F"/>
+                </a:solidFill>
+                <a:latin typeface="Courier"/>
+              </a:rPr>
+              <a:t>(count)) </a:t>
+            </a:r>
+            <a:r>
+              <a:rPr>
+                <a:solidFill>
+                  <a:srgbClr val="5E5E5E"/>
+                </a:solidFill>
+                <a:latin typeface="Courier"/>
+              </a:rPr>
+              <a:t>%&gt;%</a:t>
+            </a:r>
+            <a:br/>
+            <a:r>
+              <a:rPr>
+                <a:solidFill>
+                  <a:srgbClr val="003B4F"/>
+                </a:solidFill>
+                <a:latin typeface="Courier"/>
+              </a:rPr>
+              <a:t>  </a:t>
+            </a:r>
+            <a:r>
+              <a:rPr>
+                <a:solidFill>
+                  <a:srgbClr val="4758AB"/>
+                </a:solidFill>
+                <a:latin typeface="Courier"/>
+              </a:rPr>
+              <a:t>slice</a:t>
+            </a:r>
+            <a:r>
+              <a:rPr>
+                <a:solidFill>
+                  <a:srgbClr val="003B4F"/>
+                </a:solidFill>
+                <a:latin typeface="Courier"/>
+              </a:rPr>
+              <a:t>(</a:t>
+            </a:r>
+            <a:r>
+              <a:rPr>
+                <a:solidFill>
+                  <a:srgbClr val="AD0000"/>
+                </a:solidFill>
+                <a:latin typeface="Courier"/>
+              </a:rPr>
+              <a:t>1</a:t>
+            </a:r>
+            <a:r>
+              <a:rPr>
+                <a:solidFill>
+                  <a:srgbClr val="003B4F"/>
+                </a:solidFill>
+                <a:latin typeface="Courier"/>
+              </a:rPr>
+              <a:t>) </a:t>
+            </a:r>
+            <a:r>
+              <a:rPr>
+                <a:solidFill>
+                  <a:srgbClr val="5E5E5E"/>
+                </a:solidFill>
+                <a:latin typeface="Courier"/>
+              </a:rPr>
+              <a:t>%&gt;%</a:t>
+            </a:r>
+            <a:br/>
+            <a:r>
+              <a:rPr>
+                <a:solidFill>
+                  <a:srgbClr val="003B4F"/>
+                </a:solidFill>
+                <a:latin typeface="Courier"/>
+              </a:rPr>
+              <a:t>  </a:t>
+            </a:r>
+            <a:r>
+              <a:rPr>
+                <a:solidFill>
+                  <a:srgbClr val="4758AB"/>
+                </a:solidFill>
+                <a:latin typeface="Courier"/>
+              </a:rPr>
+              <a:t>select</a:t>
+            </a:r>
+            <a:r>
+              <a:rPr>
+                <a:solidFill>
+                  <a:srgbClr val="003B4F"/>
+                </a:solidFill>
+                <a:latin typeface="Courier"/>
+              </a:rPr>
+              <a:t>(</a:t>
+            </a:r>
+            <a:r>
+              <a:rPr>
+                <a:solidFill>
+                  <a:srgbClr val="5E5E5E"/>
+                </a:solidFill>
+                <a:latin typeface="Courier"/>
+              </a:rPr>
+              <a:t>-</a:t>
+            </a:r>
+            <a:r>
+              <a:rPr>
+                <a:solidFill>
+                  <a:srgbClr val="003B4F"/>
+                </a:solidFill>
+                <a:latin typeface="Courier"/>
+              </a:rPr>
+              <a:t>count) </a:t>
+            </a:r>
+            <a:r>
+              <a:rPr>
+                <a:solidFill>
+                  <a:srgbClr val="5E5E5E"/>
+                </a:solidFill>
+                <a:latin typeface="Courier"/>
+              </a:rPr>
+              <a:t>%&gt;%</a:t>
+            </a:r>
+            <a:br/>
+            <a:r>
+              <a:rPr>
+                <a:solidFill>
+                  <a:srgbClr val="003B4F"/>
+                </a:solidFill>
+                <a:latin typeface="Courier"/>
+              </a:rPr>
+              <a:t>  </a:t>
+            </a:r>
+            <a:r>
+              <a:rPr>
+                <a:solidFill>
+                  <a:srgbClr val="4758AB"/>
+                </a:solidFill>
+                <a:latin typeface="Courier"/>
+              </a:rPr>
+              <a:t>rename</a:t>
+            </a:r>
+            <a:r>
+              <a:rPr>
+                <a:solidFill>
+                  <a:srgbClr val="003B4F"/>
+                </a:solidFill>
+                <a:latin typeface="Courier"/>
+              </a:rPr>
+              <a:t>(</a:t>
+            </a:r>
+            <a:r>
+              <a:rPr>
+                <a:solidFill>
+                  <a:srgbClr val="657422"/>
+                </a:solidFill>
+                <a:latin typeface="Courier"/>
+              </a:rPr>
+              <a:t>mode_mass =</a:t>
+            </a:r>
+            <a:r>
+              <a:rPr>
+                <a:solidFill>
+                  <a:srgbClr val="003B4F"/>
+                </a:solidFill>
+                <a:latin typeface="Courier"/>
+              </a:rPr>
+              <a:t> mass_g)</a:t>
+            </a:r>
+          </a:p>
+          <a:p>
+            <a:pPr lvl="0" indent="0">
+              <a:buNone/>
+            </a:pPr>
+            <a:r>
+              <a:rPr>
+                <a:latin typeface="Courier"/>
+              </a:rPr>
+              <a:t># A tibble: 6 × 2
+# Groups:   lake [6]
+  lake        mode_mass
+  &lt;chr&gt;           &lt;dbl&gt;
+1 I8               1000
+2 Island Lake      2200
+3 N 01             1000
+4 NE 12              90
+5 NE 14            1150
+6 Toolik            340</a:t>
+            </a:r>
+          </a:p>
         </p:txBody>
       </p:sp>
     </p:spTree>
@@ -7628,7 +8228,7 @@
             <a:pPr lvl="2"/>
             <a:r>
               <a:rPr/>
-              <a:t>Equal variance</a:t>
+              <a:t>Equal variance (or Welches T Test)</a:t>
             </a:r>
           </a:p>
           <a:p>
@@ -7642,7 +8242,7 @@
             <a:pPr lvl="0"/>
             <a:r>
               <a:rPr/>
-              <a:t>Non-parametric tests: no assumption about probability distribution</a:t>
+              <a:t>Non-parametric tests: no assumption about probability distribution/normality</a:t>
             </a:r>
           </a:p>
           <a:p>
@@ -7771,7 +8371,7 @@
             <a:pPr lvl="0"/>
             <a:r>
               <a:rPr/>
-              <a:t>Most parametric tests robust to mild/moderate violations of below assumptions</a:t>
+              <a:t>Most parametric tests robust to mild/moderate violations of normality assumptions</a:t>
             </a:r>
           </a:p>
         </p:txBody>
@@ -8076,7 +8676,7 @@
               <a:t>Lets do the above for one lake - </a:t>
             </a:r>
             <a:r>
-              <a:rPr>
+              <a:rPr b="1">
                 <a:latin typeface="Courier"/>
               </a:rPr>
               <a:t>NE 12</a:t>
@@ -8143,7 +8743,7 @@
       </p:sp>
       <p:pic>
         <p:nvPicPr>
-          <p:cNvPr descr="07_01_lecture_powerpoint_files/figure-pptx/unnamed-chunk-2-1.png" id="0" name="Picture 1"/>
+          <p:cNvPr descr="07_01_lecture_powerpoint_files/figure-pptx/unnamed-chunk-3-1.png" id="0" name="Picture 1"/>
           <p:cNvPicPr>
             <a:picLocks noGrp="1" noChangeAspect="1"/>
           </p:cNvPicPr>
